--- a/examples/repositories/cyberppt/pages/slide-03.pptx
+++ b/examples/repositories/cyberppt/pages/slide-03.pptx
@@ -883,7 +883,7 @@
         </p:nvSpPr>
         <p:spPr>
           <a:xfrm>
-            <a:off x="226042" y="247792"/>
+            <a:off x="226042" y="269656"/>
             <a:ext cx="444793" cy="371688"/>
           </a:xfrm>
           <a:prstGeom prst="rect">
@@ -945,7 +945,7 @@
         </p:nvSpPr>
         <p:spPr>
           <a:xfrm>
-            <a:off x="1013544" y="167624"/>
+            <a:off x="991669" y="291520"/>
             <a:ext cx="10645858" cy="575751"/>
           </a:xfrm>
           <a:prstGeom prst="rect">
@@ -984,7 +984,7 @@
         </p:nvSpPr>
         <p:spPr>
           <a:xfrm>
-            <a:off x="1020836" y="801679"/>
+            <a:off x="984377" y="787103"/>
             <a:ext cx="10791692" cy="393552"/>
           </a:xfrm>
           <a:prstGeom prst="rect">
@@ -1498,7 +1498,7 @@
         </p:nvSpPr>
         <p:spPr>
           <a:xfrm>
-            <a:off x="452084" y="2310293"/>
+            <a:off x="444793" y="2295717"/>
             <a:ext cx="2019796" cy="706935"/>
           </a:xfrm>
           <a:prstGeom prst="rect">
@@ -1515,7 +1515,7 @@
               <a:buNone/>
             </a:pPr>
             <a:r>
-              <a:rPr lang="en-US" sz="1900" dirty="0">
+              <a:rPr lang="en-US" sz="2100" b="1" dirty="0">
                 <a:solidFill>
                   <a:srgbClr val="161616"/>
                 </a:solidFill>
@@ -1525,7 +1525,7 @@
               </a:rPr>
               <a:t>朝のパン市</a:t>
             </a:r>
-            <a:endParaRPr lang="en-US" sz="1900" dirty="0"/>
+            <a:endParaRPr lang="en-US" sz="2100" dirty="0"/>
           </a:p>
         </p:txBody>
       </p:sp>
@@ -1537,7 +1537,7 @@
         </p:nvSpPr>
         <p:spPr>
           <a:xfrm>
-            <a:off x="2814590" y="2310293"/>
+            <a:off x="2894798" y="2295717"/>
             <a:ext cx="1990630" cy="706935"/>
           </a:xfrm>
           <a:prstGeom prst="rect">
@@ -1554,7 +1554,7 @@
               <a:buNone/>
             </a:pPr>
             <a:r>
-              <a:rPr lang="en-US" sz="1900" dirty="0">
+              <a:rPr lang="en-US" sz="2100" b="1" dirty="0">
                 <a:solidFill>
                   <a:srgbClr val="161616"/>
                 </a:solidFill>
@@ -1564,14 +1564,14 @@
               </a:rPr>
               <a:t>11月7日（土）</a:t>
             </a:r>
-            <a:endParaRPr lang="en-US" sz="1900" dirty="0"/>
+            <a:endParaRPr lang="en-US" sz="2100" dirty="0"/>
           </a:p>
           <a:p>
             <a:pPr algn="l" indent="0" marL="0">
               <a:buNone/>
             </a:pPr>
             <a:r>
-              <a:rPr lang="en-US" sz="1900" dirty="0">
+              <a:rPr lang="en-US" sz="2100" b="1" dirty="0">
                 <a:solidFill>
                   <a:srgbClr val="161616"/>
                 </a:solidFill>
@@ -1581,7 +1581,7 @@
               </a:rPr>
               <a:t>10–12時</a:t>
             </a:r>
-            <a:endParaRPr lang="en-US" sz="1900" dirty="0"/>
+            <a:endParaRPr lang="en-US" sz="2100" dirty="0"/>
           </a:p>
         </p:txBody>
       </p:sp>
@@ -1610,7 +1610,7 @@
               <a:buNone/>
             </a:pPr>
             <a:r>
-              <a:rPr lang="en-US" sz="1900" dirty="0">
+              <a:rPr lang="en-US" sz="2100" b="1" dirty="0">
                 <a:solidFill>
                   <a:srgbClr val="161616"/>
                 </a:solidFill>
@@ -1620,7 +1620,7 @@
               </a:rPr>
               <a:t>こもれび広場</a:t>
             </a:r>
-            <a:endParaRPr lang="en-US" sz="1900" dirty="0"/>
+            <a:endParaRPr lang="en-US" sz="2100" dirty="0"/>
           </a:p>
         </p:txBody>
       </p:sp>
@@ -1649,7 +1649,7 @@
               <a:buNone/>
             </a:pPr>
             <a:r>
-              <a:rPr lang="en-US" sz="1900" dirty="0">
+              <a:rPr lang="en-US" sz="2100" b="1" dirty="0">
                 <a:solidFill>
                   <a:srgbClr val="161616"/>
                 </a:solidFill>
@@ -1659,14 +1659,14 @@
               </a:rPr>
               <a:t>入場無料／</a:t>
             </a:r>
-            <a:endParaRPr lang="en-US" sz="1900" dirty="0"/>
+            <a:endParaRPr lang="en-US" sz="2100" dirty="0"/>
           </a:p>
           <a:p>
             <a:pPr algn="l" indent="0" marL="0">
               <a:buNone/>
             </a:pPr>
             <a:r>
-              <a:rPr lang="en-US" sz="1900" dirty="0">
+              <a:rPr lang="en-US" sz="2100" b="1" dirty="0">
                 <a:solidFill>
                   <a:srgbClr val="161616"/>
                 </a:solidFill>
@@ -1676,7 +1676,7 @@
               </a:rPr>
               <a:t>購入は別</a:t>
             </a:r>
-            <a:endParaRPr lang="en-US" sz="1900" dirty="0"/>
+            <a:endParaRPr lang="en-US" sz="2100" dirty="0"/>
           </a:p>
         </p:txBody>
       </p:sp>
@@ -1705,7 +1705,7 @@
               <a:buNone/>
             </a:pPr>
             <a:r>
-              <a:rPr lang="en-US" sz="1900" dirty="0">
+              <a:rPr lang="en-US" sz="2100" b="1" dirty="0">
                 <a:solidFill>
                   <a:srgbClr val="161616"/>
                 </a:solidFill>
@@ -1715,14 +1715,14 @@
               </a:rPr>
               <a:t>小雨実施・</a:t>
             </a:r>
-            <a:endParaRPr lang="en-US" sz="1900" dirty="0"/>
+            <a:endParaRPr lang="en-US" sz="2100" dirty="0"/>
           </a:p>
           <a:p>
             <a:pPr algn="l" indent="0" marL="0">
               <a:buNone/>
             </a:pPr>
             <a:r>
-              <a:rPr lang="en-US" sz="1900" dirty="0">
+              <a:rPr lang="en-US" sz="2100" b="1" dirty="0">
                 <a:solidFill>
                   <a:srgbClr val="161616"/>
                 </a:solidFill>
@@ -1732,7 +1732,7 @@
               </a:rPr>
               <a:t>荒天中止</a:t>
             </a:r>
-            <a:endParaRPr lang="en-US" sz="1900" dirty="0"/>
+            <a:endParaRPr lang="en-US" sz="2100" dirty="0"/>
           </a:p>
         </p:txBody>
       </p:sp>
@@ -1744,7 +1744,7 @@
         </p:nvSpPr>
         <p:spPr>
           <a:xfrm>
-            <a:off x="452084" y="3308748"/>
+            <a:off x="444793" y="3316036"/>
             <a:ext cx="2019796" cy="736087"/>
           </a:xfrm>
           <a:prstGeom prst="rect">
@@ -1761,7 +1761,7 @@
               <a:buNone/>
             </a:pPr>
             <a:r>
-              <a:rPr lang="en-US" sz="1900" dirty="0">
+              <a:rPr lang="en-US" sz="2100" b="1" dirty="0">
                 <a:solidFill>
                   <a:srgbClr val="161616"/>
                 </a:solidFill>
@@ -1771,7 +1771,7 @@
               </a:rPr>
               <a:t>路地の音楽会</a:t>
             </a:r>
-            <a:endParaRPr lang="en-US" sz="1900" dirty="0"/>
+            <a:endParaRPr lang="en-US" sz="2100" dirty="0"/>
           </a:p>
         </p:txBody>
       </p:sp>
@@ -1783,8 +1783,8 @@
         </p:nvSpPr>
         <p:spPr>
           <a:xfrm>
-            <a:off x="2814590" y="3308748"/>
-            <a:ext cx="1990630" cy="736087"/>
+            <a:off x="2851048" y="3301460"/>
+            <a:ext cx="2078130" cy="736087"/>
           </a:xfrm>
           <a:prstGeom prst="rect">
             <a:avLst/>
@@ -1800,7 +1800,7 @@
               <a:buNone/>
             </a:pPr>
             <a:r>
-              <a:rPr lang="en-US" sz="1900" dirty="0">
+              <a:rPr lang="en-US" sz="2100" b="1" dirty="0">
                 <a:solidFill>
                   <a:srgbClr val="161616"/>
                 </a:solidFill>
@@ -1810,14 +1810,14 @@
               </a:rPr>
               <a:t>11月14日（土）</a:t>
             </a:r>
-            <a:endParaRPr lang="en-US" sz="1900" dirty="0"/>
+            <a:endParaRPr lang="en-US" sz="2100" dirty="0"/>
           </a:p>
           <a:p>
             <a:pPr algn="l" indent="0" marL="0">
               <a:buNone/>
             </a:pPr>
             <a:r>
-              <a:rPr lang="en-US" sz="1900" dirty="0">
+              <a:rPr lang="en-US" sz="2100" b="1" dirty="0">
                 <a:solidFill>
                   <a:srgbClr val="161616"/>
                 </a:solidFill>
@@ -1827,7 +1827,7 @@
               </a:rPr>
               <a:t>14–16時</a:t>
             </a:r>
-            <a:endParaRPr lang="en-US" sz="1900" dirty="0"/>
+            <a:endParaRPr lang="en-US" sz="2100" dirty="0"/>
           </a:p>
         </p:txBody>
       </p:sp>
@@ -1839,7 +1839,7 @@
         </p:nvSpPr>
         <p:spPr>
           <a:xfrm>
-            <a:off x="5147929" y="3308748"/>
+            <a:off x="5257304" y="3330612"/>
             <a:ext cx="2041671" cy="736087"/>
           </a:xfrm>
           <a:prstGeom prst="rect">
@@ -1856,7 +1856,7 @@
               <a:buNone/>
             </a:pPr>
             <a:r>
-              <a:rPr lang="en-US" sz="1900" dirty="0">
+              <a:rPr lang="en-US" sz="2100" b="1" dirty="0">
                 <a:solidFill>
                   <a:srgbClr val="161616"/>
                 </a:solidFill>
@@ -1866,7 +1866,7 @@
               </a:rPr>
               <a:t>ふれあい会館</a:t>
             </a:r>
-            <a:endParaRPr lang="en-US" sz="1900" dirty="0"/>
+            <a:endParaRPr lang="en-US" sz="2100" dirty="0"/>
           </a:p>
         </p:txBody>
       </p:sp>
@@ -1895,7 +1895,7 @@
               <a:buNone/>
             </a:pPr>
             <a:r>
-              <a:rPr lang="en-US" sz="1900" dirty="0">
+              <a:rPr lang="en-US" sz="2100" b="1" dirty="0">
                 <a:solidFill>
                   <a:srgbClr val="161616"/>
                 </a:solidFill>
@@ -1905,7 +1905,7 @@
               </a:rPr>
               <a:t>入場無料</a:t>
             </a:r>
-            <a:endParaRPr lang="en-US" sz="1900" dirty="0"/>
+            <a:endParaRPr lang="en-US" sz="2100" dirty="0"/>
           </a:p>
         </p:txBody>
       </p:sp>
@@ -1934,7 +1934,7 @@
               <a:buNone/>
             </a:pPr>
             <a:r>
-              <a:rPr lang="en-US" sz="1900" dirty="0">
+              <a:rPr lang="en-US" sz="2100" b="1" dirty="0">
                 <a:solidFill>
                   <a:srgbClr val="161616"/>
                 </a:solidFill>
@@ -1944,7 +1944,7 @@
               </a:rPr>
               <a:t>屋内開催</a:t>
             </a:r>
-            <a:endParaRPr lang="en-US" sz="1900" dirty="0"/>
+            <a:endParaRPr lang="en-US" sz="2100" dirty="0"/>
           </a:p>
         </p:txBody>
       </p:sp>
@@ -1956,7 +1956,7 @@
         </p:nvSpPr>
         <p:spPr>
           <a:xfrm>
-            <a:off x="452084" y="4336355"/>
+            <a:off x="437501" y="4336355"/>
             <a:ext cx="2019796" cy="721511"/>
           </a:xfrm>
           <a:prstGeom prst="rect">
@@ -1973,7 +1973,7 @@
               <a:buNone/>
             </a:pPr>
             <a:r>
-              <a:rPr lang="en-US" sz="1900" dirty="0">
+              <a:rPr lang="en-US" sz="2100" b="1" dirty="0">
                 <a:solidFill>
                   <a:srgbClr val="161616"/>
                 </a:solidFill>
@@ -1983,7 +1983,7 @@
               </a:rPr>
               <a:t>夕暮れ古本交換</a:t>
             </a:r>
-            <a:endParaRPr lang="en-US" sz="1900" dirty="0"/>
+            <a:endParaRPr lang="en-US" sz="2100" dirty="0"/>
           </a:p>
         </p:txBody>
       </p:sp>
@@ -1995,8 +1995,8 @@
         </p:nvSpPr>
         <p:spPr>
           <a:xfrm>
-            <a:off x="2814590" y="4336355"/>
-            <a:ext cx="1990630" cy="721511"/>
+            <a:off x="2851048" y="4329067"/>
+            <a:ext cx="2078130" cy="721511"/>
           </a:xfrm>
           <a:prstGeom prst="rect">
             <a:avLst/>
@@ -2012,7 +2012,7 @@
               <a:buNone/>
             </a:pPr>
             <a:r>
-              <a:rPr lang="en-US" sz="1900" dirty="0">
+              <a:rPr lang="en-US" sz="2100" b="1" dirty="0">
                 <a:solidFill>
                   <a:srgbClr val="161616"/>
                 </a:solidFill>
@@ -2022,14 +2022,14 @@
               </a:rPr>
               <a:t>11月21日（土）</a:t>
             </a:r>
-            <a:endParaRPr lang="en-US" sz="1900" dirty="0"/>
+            <a:endParaRPr lang="en-US" sz="2100" dirty="0"/>
           </a:p>
           <a:p>
             <a:pPr algn="l" indent="0" marL="0">
               <a:buNone/>
             </a:pPr>
             <a:r>
-              <a:rPr lang="en-US" sz="1900" dirty="0">
+              <a:rPr lang="en-US" sz="2100" b="1" dirty="0">
                 <a:solidFill>
                   <a:srgbClr val="161616"/>
                 </a:solidFill>
@@ -2039,7 +2039,7 @@
               </a:rPr>
               <a:t>16–18時</a:t>
             </a:r>
-            <a:endParaRPr lang="en-US" sz="1900" dirty="0"/>
+            <a:endParaRPr lang="en-US" sz="2100" dirty="0"/>
           </a:p>
         </p:txBody>
       </p:sp>
@@ -2051,7 +2051,7 @@
         </p:nvSpPr>
         <p:spPr>
           <a:xfrm>
-            <a:off x="5147929" y="4336355"/>
+            <a:off x="5250012" y="4358219"/>
             <a:ext cx="2041671" cy="721511"/>
           </a:xfrm>
           <a:prstGeom prst="rect">
@@ -2068,7 +2068,7 @@
               <a:buNone/>
             </a:pPr>
             <a:r>
-              <a:rPr lang="en-US" sz="1900" dirty="0">
+              <a:rPr lang="en-US" sz="2100" b="1" dirty="0">
                 <a:solidFill>
                   <a:srgbClr val="161616"/>
                 </a:solidFill>
@@ -2078,7 +2078,7 @@
               </a:rPr>
               <a:t>駅前アーケード</a:t>
             </a:r>
-            <a:endParaRPr lang="en-US" sz="1900" dirty="0"/>
+            <a:endParaRPr lang="en-US" sz="2100" dirty="0"/>
           </a:p>
         </p:txBody>
       </p:sp>
@@ -2107,7 +2107,7 @@
               <a:buNone/>
             </a:pPr>
             <a:r>
-              <a:rPr lang="en-US" sz="1900" dirty="0">
+              <a:rPr lang="en-US" sz="2100" b="1" dirty="0">
                 <a:solidFill>
                   <a:srgbClr val="161616"/>
                 </a:solidFill>
@@ -2117,7 +2117,7 @@
               </a:rPr>
               <a:t>参加無料</a:t>
             </a:r>
-            <a:endParaRPr lang="en-US" sz="1900" dirty="0"/>
+            <a:endParaRPr lang="en-US" sz="2100" dirty="0"/>
           </a:p>
         </p:txBody>
       </p:sp>
@@ -2146,7 +2146,7 @@
               <a:buNone/>
             </a:pPr>
             <a:r>
-              <a:rPr lang="en-US" sz="1900" dirty="0">
+              <a:rPr lang="en-US" sz="2100" b="1" dirty="0">
                 <a:solidFill>
                   <a:srgbClr val="161616"/>
                 </a:solidFill>
@@ -2156,7 +2156,7 @@
               </a:rPr>
               <a:t>屋根下で実施</a:t>
             </a:r>
-            <a:endParaRPr lang="en-US" sz="1900" dirty="0"/>
+            <a:endParaRPr lang="en-US" sz="2100" dirty="0"/>
           </a:p>
         </p:txBody>
       </p:sp>
@@ -2246,7 +2246,7 @@
         </p:nvSpPr>
         <p:spPr>
           <a:xfrm>
-            <a:off x="255209" y="6187505"/>
+            <a:off x="255209" y="6041745"/>
             <a:ext cx="11695861" cy="3644"/>
           </a:xfrm>
           <a:prstGeom prst="line">
@@ -2269,8 +2269,8 @@
         </p:nvSpPr>
         <p:spPr>
           <a:xfrm>
-            <a:off x="255209" y="6289537"/>
-            <a:ext cx="8677104" cy="393552"/>
+            <a:off x="240626" y="6121913"/>
+            <a:ext cx="11302110" cy="393552"/>
           </a:xfrm>
           <a:prstGeom prst="rect">
             <a:avLst/>
@@ -2308,8 +2308,8 @@
         </p:nvSpPr>
         <p:spPr>
           <a:xfrm>
-            <a:off x="9318772" y="6457160"/>
-            <a:ext cx="2661465" cy="233216"/>
+            <a:off x="291667" y="6559192"/>
+            <a:ext cx="11608361" cy="189488"/>
           </a:xfrm>
           <a:prstGeom prst="rect">
             <a:avLst/>
@@ -2325,9 +2325,9 @@
               <a:buNone/>
             </a:pPr>
             <a:r>
-              <a:rPr lang="en-US" sz="1000" dirty="0">
-                <a:solidFill>
-                  <a:srgbClr val="161616"/>
+              <a:rPr lang="en-US" sz="1100" dirty="0">
+                <a:solidFill>
+                  <a:srgbClr val="514B44"/>
                 </a:solidFill>
                 <a:latin typeface="Yu Gothic" pitchFamily="34" charset="0"/>
                 <a:ea typeface="Yu Gothic" pitchFamily="34" charset="-122"/>
@@ -2335,7 +2335,7 @@
               </a:rPr>
               <a:t>架空の企画例。開催情報はすべて例示。</a:t>
             </a:r>
-            <a:endParaRPr lang="en-US" sz="1000" dirty="0"/>
+            <a:endParaRPr lang="en-US" sz="1100" dirty="0"/>
           </a:p>
         </p:txBody>
       </p:sp>
